--- a/decks/maths-perimeter-area/maths-perimeter-area_ch2_perimeter.pptx
+++ b/decks/maths-perimeter-area/maths-perimeter-area_ch2_perimeter.pptx
@@ -124,29 +124,29 @@
   <p:extLst>
     <p:ext uri="{521415D9-36F7-43E2-AB2F-B90AF26B5E84}">
       <p14:sectionLst xmlns:p14="http://schemas.microsoft.com/office/powerpoint/2010/main">
-        <p14:section name="Opening" id="{1d2533de-ba54-597f-f4d8-803450139bcc}">
+        <p14:section name="Opening" id="{6d0dd2f1-2ef7-6689-19e2-924bebb10cb0}">
           <p14:sldIdLst>
             <p14:sldId id="256"/>
           </p14:sldIdLst>
         </p14:section>
-        <p14:section name="Gate" id="{e6fdba1f-6525-9208-523e-ba703f37decd}">
+        <p14:section name="Gate" id="{509deded-ad3c-683b-b713-16ff447cdf78}">
           <p14:sldIdLst>
             <p14:sldId id="257"/>
             <p14:sldId id="258"/>
           </p14:sldIdLst>
         </p14:section>
-        <p14:section name="Pre-teach" id="{211ee3ef-a26b-719c-184a-b8d3e2b4891a}">
+        <p14:section name="Pre-teach" id="{e19b0863-8f26-956d-c986-1b0260d36863}">
           <p14:sldIdLst>
             <p14:sldId id="259"/>
           </p14:sldIdLst>
         </p14:section>
-        <p14:section name="Read-along" id="{af124028-d946-6d1e-1017-adc8a5776f71}">
+        <p14:section name="Read-along" id="{544e8fc0-d3e1-1324-5bcd-03f461f297d0}">
           <p14:sldIdLst>
             <p14:sldId id="260"/>
             <p14:sldId id="261"/>
           </p14:sldIdLst>
         </p14:section>
-        <p14:section name="Teach" id="{891e21e7-e22a-d92a-37fc-98778cd02d0a}">
+        <p14:section name="Teach" id="{422103ff-9218-bc91-3b6d-fae6cdb65138}">
           <p14:sldIdLst>
             <p14:sldId id="262"/>
             <p14:sldId id="263"/>
@@ -155,19 +155,19 @@
             <p14:sldId id="266"/>
           </p14:sldIdLst>
         </p14:section>
-        <p14:section name="Routes" id="{3bdd1552-1bba-5629-bcd6-76a3e2149a90}">
+        <p14:section name="Routes" id="{199408db-ec7d-1a62-ca57-b73d049bd7f3}">
           <p14:sldIdLst>
             <p14:sldId id="267"/>
             <p14:sldId id="268"/>
             <p14:sldId id="269"/>
           </p14:sldIdLst>
         </p14:section>
-        <p14:section name="Close" id="{783380cc-5565-913b-17bb-a10b6ddb061d}">
+        <p14:section name="Close" id="{dc3855b2-0bd9-84af-aaea-23308f7a6ea5}">
           <p14:sldIdLst>
             <p14:sldId id="270"/>
           </p14:sldIdLst>
         </p14:section>
-        <p14:section name="Answers" id="{97ba601d-1abb-b9a6-4260-26c3ac6a1d2d}">
+        <p14:section name="Answers" id="{6cb93cee-437c-bed8-effd-3c6a3f37299d}">
           <p14:sldIdLst>
             <p14:sldId id="271"/>
             <p14:sldId id="272"/>
@@ -10956,7 +10956,7 @@
                 <a:ea typeface="Calibri" pitchFamily="34" charset="-122"/>
                 <a:cs typeface="Calibri" pitchFamily="34" charset="-120"/>
               </a:rPr>
-              <a:t>9 + 6</a:t>
+              <a:t>9 × 5</a:t>
             </a:r>
             <a:endParaRPr lang="en-US" sz="2400" dirty="0"/>
           </a:p>
@@ -11067,7 +11067,7 @@
                 <a:ea typeface="Calibri" pitchFamily="34" charset="-122"/>
                 <a:cs typeface="Calibri" pitchFamily="34" charset="-120"/>
               </a:rPr>
-              <a:t>9 × 5</a:t>
+              <a:t>9 + 6</a:t>
             </a:r>
             <a:endParaRPr lang="en-US" sz="2400" dirty="0"/>
           </a:p>

--- a/decks/maths-perimeter-area/maths-perimeter-area_ch2_perimeter.pptx
+++ b/decks/maths-perimeter-area/maths-perimeter-area_ch2_perimeter.pptx
@@ -124,29 +124,29 @@
   <p:extLst>
     <p:ext uri="{521415D9-36F7-43E2-AB2F-B90AF26B5E84}">
       <p14:sectionLst xmlns:p14="http://schemas.microsoft.com/office/powerpoint/2010/main">
-        <p14:section name="Opening" id="{6d0dd2f1-2ef7-6689-19e2-924bebb10cb0}">
+        <p14:section name="Opening" id="{fd757908-3c87-615e-ebba-b0b36297a68d}">
           <p14:sldIdLst>
             <p14:sldId id="256"/>
           </p14:sldIdLst>
         </p14:section>
-        <p14:section name="Gate" id="{509deded-ad3c-683b-b713-16ff447cdf78}">
+        <p14:section name="Gate" id="{d31f4a18-b079-10c1-b0fa-a4f8a991a9bf}">
           <p14:sldIdLst>
             <p14:sldId id="257"/>
             <p14:sldId id="258"/>
           </p14:sldIdLst>
         </p14:section>
-        <p14:section name="Pre-teach" id="{e19b0863-8f26-956d-c986-1b0260d36863}">
+        <p14:section name="Pre-teach" id="{a8268b00-4398-6c49-5859-357fbb2a5d8e}">
           <p14:sldIdLst>
             <p14:sldId id="259"/>
           </p14:sldIdLst>
         </p14:section>
-        <p14:section name="Read-along" id="{544e8fc0-d3e1-1324-5bcd-03f461f297d0}">
+        <p14:section name="Read-along" id="{896cc58a-ef37-c359-fa9c-ad9bfbbc1446}">
           <p14:sldIdLst>
             <p14:sldId id="260"/>
             <p14:sldId id="261"/>
           </p14:sldIdLst>
         </p14:section>
-        <p14:section name="Teach" id="{422103ff-9218-bc91-3b6d-fae6cdb65138}">
+        <p14:section name="Teach" id="{f840cf1f-a9d2-ba24-06b4-a7663d823f53}">
           <p14:sldIdLst>
             <p14:sldId id="262"/>
             <p14:sldId id="263"/>
@@ -155,19 +155,19 @@
             <p14:sldId id="266"/>
           </p14:sldIdLst>
         </p14:section>
-        <p14:section name="Routes" id="{199408db-ec7d-1a62-ca57-b73d049bd7f3}">
+        <p14:section name="Routes" id="{159be6cb-990a-2fb9-8307-16598b26f3d1}">
           <p14:sldIdLst>
             <p14:sldId id="267"/>
             <p14:sldId id="268"/>
             <p14:sldId id="269"/>
           </p14:sldIdLst>
         </p14:section>
-        <p14:section name="Close" id="{dc3855b2-0bd9-84af-aaea-23308f7a6ea5}">
+        <p14:section name="Close" id="{60346cd9-bfcf-6bb7-3f3d-2e1631ff00b5}">
           <p14:sldIdLst>
             <p14:sldId id="270"/>
           </p14:sldIdLst>
         </p14:section>
-        <p14:section name="Answers" id="{6cb93cee-437c-bed8-effd-3c6a3f37299d}">
+        <p14:section name="Answers" id="{d6e7a163-2d6d-ac22-30ba-c0a1f2485dcf}">
           <p14:sldIdLst>
             <p14:sldId id="271"/>
             <p14:sldId id="272"/>
